--- a/presentations/08-asm-capstone/08-asm-capstone-lab.pptx
+++ b/presentations/08-asm-capstone/08-asm-capstone-lab.pptx
@@ -133,7 +133,7 @@
   <p:extLst>
     <p:ext uri="{521415D9-36F7-43E2-AB2F-B90AF26B5E84}">
       <p14:sectionLst xmlns:p14="http://schemas.microsoft.com/office/powerpoint/2010/main">
-        <p14:section name="Opening" id="{3e94171a-9016-e507-ce92-89a199f388e3}">
+        <p14:section name="Opening" id="{1b1df00b-beda-7629-2b4a-218d6c4eccc6}">
           <p14:sldIdLst>
             <p14:sldId id="256"/>
             <p14:sldId id="257"/>
@@ -142,7 +142,7 @@
             <p14:sldId id="260"/>
           </p14:sldIdLst>
         </p14:section>
-        <p14:section name="Score" id="{18bb897a-4f97-2393-17f3-d4cac2479a3c}">
+        <p14:section name="Score" id="{2bf6c1f2-6e14-62f7-9992-03240d7d5687}">
           <p14:sldIdLst>
             <p14:sldId id="261"/>
             <p14:sldId id="262"/>
@@ -151,7 +151,7 @@
             <p14:sldId id="265"/>
           </p14:sldIdLst>
         </p14:section>
-        <p14:section name="Sound" id="{c762880f-e650-cebc-b002-ab15ed2f83c0}">
+        <p14:section name="Sound" id="{be76e182-1e1d-39c0-8231-d09cd4f8af9f}">
           <p14:sldIdLst>
             <p14:sldId id="266"/>
             <p14:sldId id="267"/>
@@ -159,7 +159,7 @@
             <p14:sldId id="269"/>
           </p14:sldIdLst>
         </p14:section>
-        <p14:section name="Pause" id="{e019e9f7-fdd8-0571-9838-8d848854c61f}">
+        <p14:section name="Pause" id="{bc1e7312-1925-f576-e0f0-0be2ec531818}">
           <p14:sldIdLst>
             <p14:sldId id="270"/>
             <p14:sldId id="271"/>
@@ -169,7 +169,7 @@
             <p14:sldId id="275"/>
           </p14:sldIdLst>
         </p14:section>
-        <p14:section name="Ship and review" id="{c016059c-c7b9-3055-89af-fe24653aedce}">
+        <p14:section name="Ship and review" id="{eabdba04-21e0-0bd8-35d7-48736d1b321c}">
           <p14:sldIdLst>
             <p14:sldId id="276"/>
             <p14:sldId id="277"/>
@@ -179,7 +179,7 @@
             <p14:sldId id="281"/>
           </p14:sldIdLst>
         </p14:section>
-        <p14:section name="Closing" id="{e809a60c-a24a-7fb1-3bf8-9ce711ac9afc}">
+        <p14:section name="Closing" id="{d39e91f5-b173-cf23-bcaf-308ce44cb388}">
           <p14:sldIdLst>
             <p14:sldId id="282"/>
           </p14:sldIdLst>
@@ -4815,7 +4815,7 @@
               <a:buNone/>
             </a:pPr>
             <a:r>
-              <a:rPr lang="en-US" sz="1150" dirty="0">
+              <a:rPr lang="en-US" sz="1250" dirty="0">
                 <a:solidFill>
                   <a:srgbClr val="E6EDF2"/>
                 </a:solidFill>
@@ -4829,7 +4829,7 @@
               <a:buNone/>
             </a:pPr>
             <a:r>
-              <a:rPr lang="en-US" sz="1150" dirty="0">
+              <a:rPr lang="en-US" sz="1250" dirty="0">
                 <a:solidFill>
                   <a:srgbClr val="8FB3A0"/>
                 </a:solidFill>
@@ -4839,14 +4839,14 @@
               </a:rPr>
               <a:t># channel</a:t>
             </a:r>
-            <a:endParaRPr lang="en-US" sz="1150" dirty="0"/>
+            <a:endParaRPr lang="en-US" sz="1250" dirty="0"/>
           </a:p>
           <a:p>
             <a:pPr indent="0" marL="0">
               <a:buNone/>
             </a:pPr>
             <a:r>
-              <a:rPr lang="en-US" sz="1150" dirty="0">
+              <a:rPr lang="en-US" sz="1250" dirty="0">
                 <a:solidFill>
                   <a:srgbClr val="E6EDF2"/>
                 </a:solidFill>
@@ -4860,7 +4860,7 @@
               <a:buNone/>
             </a:pPr>
             <a:r>
-              <a:rPr lang="en-US" sz="1150" dirty="0">
+              <a:rPr lang="en-US" sz="1250" dirty="0">
                 <a:solidFill>
                   <a:srgbClr val="8FB3A0"/>
                 </a:solidFill>
@@ -4870,14 +4870,14 @@
               </a:rPr>
               <a:t># instrument</a:t>
             </a:r>
-            <a:endParaRPr lang="en-US" sz="1150" dirty="0"/>
+            <a:endParaRPr lang="en-US" sz="1250" dirty="0"/>
           </a:p>
           <a:p>
             <a:pPr indent="0" marL="0">
               <a:buNone/>
             </a:pPr>
             <a:r>
-              <a:rPr lang="en-US" sz="1150" dirty="0">
+              <a:rPr lang="en-US" sz="1250" dirty="0">
                 <a:solidFill>
                   <a:srgbClr val="E6EDF2"/>
                 </a:solidFill>
@@ -4891,7 +4891,7 @@
               <a:buNone/>
             </a:pPr>
             <a:r>
-              <a:rPr lang="en-US" sz="1150" dirty="0">
+              <a:rPr lang="en-US" sz="1250" dirty="0">
                 <a:solidFill>
                   <a:srgbClr val="8FB3A0"/>
                 </a:solidFill>
@@ -4901,14 +4901,14 @@
               </a:rPr>
               <a:t># MIDI note 72 = C5</a:t>
             </a:r>
-            <a:endParaRPr lang="en-US" sz="1150" dirty="0"/>
+            <a:endParaRPr lang="en-US" sz="1250" dirty="0"/>
           </a:p>
           <a:p>
             <a:pPr indent="0" marL="0">
               <a:buNone/>
             </a:pPr>
             <a:r>
-              <a:rPr lang="en-US" sz="1150" dirty="0">
+              <a:rPr lang="en-US" sz="1250" dirty="0">
                 <a:solidFill>
                   <a:srgbClr val="E6EDF2"/>
                 </a:solidFill>
@@ -4922,7 +4922,7 @@
               <a:buNone/>
             </a:pPr>
             <a:r>
-              <a:rPr lang="en-US" sz="1150" dirty="0">
+              <a:rPr lang="en-US" sz="1250" dirty="0">
                 <a:solidFill>
                   <a:srgbClr val="8FB3A0"/>
                 </a:solidFill>
@@ -4932,14 +4932,14 @@
               </a:rPr>
               <a:t># volume</a:t>
             </a:r>
-            <a:endParaRPr lang="en-US" sz="1150" dirty="0"/>
+            <a:endParaRPr lang="en-US" sz="1250" dirty="0"/>
           </a:p>
           <a:p>
             <a:pPr indent="0" marL="0">
               <a:buNone/>
             </a:pPr>
             <a:r>
-              <a:rPr lang="en-US" sz="1150" dirty="0">
+              <a:rPr lang="en-US" sz="1250" dirty="0">
                 <a:solidFill>
                   <a:srgbClr val="E6EDF2"/>
                 </a:solidFill>
@@ -4953,7 +4953,7 @@
               <a:buNone/>
             </a:pPr>
             <a:r>
-              <a:rPr lang="en-US" sz="1150" dirty="0">
+              <a:rPr lang="en-US" sz="1250" dirty="0">
                 <a:solidFill>
                   <a:srgbClr val="8FB3A0"/>
                 </a:solidFill>
@@ -4963,14 +4963,14 @@
               </a:rPr>
               <a:t># milliseconds</a:t>
             </a:r>
-            <a:endParaRPr lang="en-US" sz="1150" dirty="0"/>
+            <a:endParaRPr lang="en-US" sz="1250" dirty="0"/>
           </a:p>
           <a:p>
             <a:pPr indent="0" marL="0">
               <a:buNone/>
             </a:pPr>
             <a:r>
-              <a:rPr lang="en-US" sz="1150" dirty="0">
+              <a:rPr lang="en-US" sz="1250" dirty="0">
                 <a:solidFill>
                   <a:srgbClr val="E6EDF2"/>
                 </a:solidFill>
@@ -4984,7 +4984,7 @@
               <a:buNone/>
             </a:pPr>
             <a:r>
-              <a:rPr lang="en-US" sz="1150" dirty="0">
+              <a:rPr lang="en-US" sz="1250" dirty="0">
                 <a:solidFill>
                   <a:srgbClr val="8FB3A0"/>
                 </a:solidFill>
@@ -4992,9 +4992,26 @@
                 <a:ea typeface="Courier New" pitchFamily="34" charset="-122"/>
                 <a:cs typeface="Courier New" pitchFamily="34" charset="-120"/>
               </a:rPr>
-              <a:t># t registers are dead after this call</a:t>
-            </a:r>
-            <a:endParaRPr lang="en-US" sz="1150" dirty="0"/>
+              <a:t># t registers are dead after this</a:t>
+            </a:r>
+            <a:endParaRPr lang="en-US" sz="1250" dirty="0"/>
+          </a:p>
+          <a:p>
+            <a:pPr indent="0" marL="0">
+              <a:buNone/>
+            </a:pPr>
+            <a:r>
+              <a:rPr lang="en-US" sz="1250" dirty="0">
+                <a:solidFill>
+                  <a:srgbClr val="E6EDF2"/>
+                </a:solidFill>
+                <a:latin typeface="Courier New" pitchFamily="34" charset="0"/>
+                <a:ea typeface="Courier New" pitchFamily="34" charset="-122"/>
+                <a:cs typeface="Courier New" pitchFamily="34" charset="-120"/>
+              </a:rPr>
+              <a:t>        call</a:t>
+            </a:r>
+            <a:endParaRPr lang="en-US" sz="1250" dirty="0"/>
           </a:p>
         </p:txBody>
       </p:sp>
@@ -8001,7 +8018,7 @@
               <a:buNone/>
             </a:pPr>
             <a:r>
-              <a:rPr lang="en-US" sz="1100" dirty="0">
+              <a:rPr lang="en-US" sz="1250" dirty="0">
                 <a:solidFill>
                   <a:srgbClr val="E6EDF2"/>
                 </a:solidFill>
@@ -8015,7 +8032,7 @@
               <a:buNone/>
             </a:pPr>
             <a:r>
-              <a:rPr lang="en-US" sz="1100" dirty="0">
+              <a:rPr lang="en-US" sz="1250" dirty="0">
                 <a:solidFill>
                   <a:srgbClr val="8FB3A0"/>
                 </a:solidFill>
@@ -8025,14 +8042,14 @@
               </a:rPr>
               <a:t># --- pause: toggle on the EDGE of A, not on its level</a:t>
             </a:r>
-            <a:endParaRPr lang="en-US" sz="1100" dirty="0"/>
+            <a:endParaRPr lang="en-US" sz="1250" dirty="0"/>
           </a:p>
           <a:p>
             <a:pPr indent="0" marL="0">
               <a:buNone/>
             </a:pPr>
             <a:r>
-              <a:rPr lang="en-US" sz="1100" dirty="0">
+              <a:rPr lang="en-US" sz="1250" dirty="0">
                 <a:solidFill>
                   <a:srgbClr val="E6EDF2"/>
                 </a:solidFill>
@@ -8042,14 +8059,14 @@
               </a:rPr>
               <a:t>    call prg32_input_read</a:t>
             </a:r>
-            <a:endParaRPr lang="en-US" sz="1100" dirty="0"/>
+            <a:endParaRPr lang="en-US" sz="1250" dirty="0"/>
           </a:p>
           <a:p>
             <a:pPr indent="0" marL="0">
               <a:buNone/>
             </a:pPr>
             <a:r>
-              <a:rPr lang="en-US" sz="1100" dirty="0">
+              <a:rPr lang="en-US" sz="1250" dirty="0">
                 <a:solidFill>
                   <a:srgbClr val="E6EDF2"/>
                 </a:solidFill>
@@ -8063,7 +8080,7 @@
               <a:buNone/>
             </a:pPr>
             <a:r>
-              <a:rPr lang="en-US" sz="1100" dirty="0">
+              <a:rPr lang="en-US" sz="1250" dirty="0">
                 <a:solidFill>
                   <a:srgbClr val="8FB3A0"/>
                 </a:solidFill>
@@ -8073,14 +8090,14 @@
               </a:rPr>
               <a:t># s0 survives the calls below</a:t>
             </a:r>
-            <a:endParaRPr lang="en-US" sz="1100" dirty="0"/>
+            <a:endParaRPr lang="en-US" sz="1250" dirty="0"/>
           </a:p>
           <a:p>
             <a:pPr indent="0" marL="0">
               <a:buNone/>
             </a:pPr>
             <a:r>
-              <a:rPr lang="en-US" sz="1100" dirty="0">
+              <a:rPr lang="en-US" sz="1250" dirty="0">
                 <a:solidFill>
                   <a:srgbClr val="E6EDF2"/>
                 </a:solidFill>
@@ -8090,14 +8107,14 @@
               </a:rPr>
               <a:t>    la   t0, previous_input</a:t>
             </a:r>
-            <a:endParaRPr lang="en-US" sz="1100" dirty="0"/>
+            <a:endParaRPr lang="en-US" sz="1250" dirty="0"/>
           </a:p>
           <a:p>
             <a:pPr indent="0" marL="0">
               <a:buNone/>
             </a:pPr>
             <a:r>
-              <a:rPr lang="en-US" sz="1100" dirty="0">
+              <a:rPr lang="en-US" sz="1250" dirty="0">
                 <a:solidFill>
                   <a:srgbClr val="E6EDF2"/>
                 </a:solidFill>
@@ -8111,7 +8128,7 @@
               <a:buNone/>
             </a:pPr>
             <a:r>
-              <a:rPr lang="en-US" sz="1100" dirty="0">
+              <a:rPr lang="en-US" sz="1250" dirty="0">
                 <a:solidFill>
                   <a:srgbClr val="8FB3A0"/>
                 </a:solidFill>
@@ -8121,14 +8138,14 @@
               </a:rPr>
               <a:t># buttons held last frame</a:t>
             </a:r>
-            <a:endParaRPr lang="en-US" sz="1100" dirty="0"/>
+            <a:endParaRPr lang="en-US" sz="1250" dirty="0"/>
           </a:p>
           <a:p>
             <a:pPr indent="0" marL="0">
               <a:buNone/>
             </a:pPr>
             <a:r>
-              <a:rPr lang="en-US" sz="1100" dirty="0">
+              <a:rPr lang="en-US" sz="1250" dirty="0">
                 <a:solidFill>
                   <a:srgbClr val="E6EDF2"/>
                 </a:solidFill>
@@ -8142,7 +8159,7 @@
               <a:buNone/>
             </a:pPr>
             <a:r>
-              <a:rPr lang="en-US" sz="1100" dirty="0">
+              <a:rPr lang="en-US" sz="1250" dirty="0">
                 <a:solidFill>
                   <a:srgbClr val="8FB3A0"/>
                 </a:solidFill>
@@ -8150,16 +8167,16 @@
                 <a:ea typeface="Courier New" pitchFamily="34" charset="-122"/>
                 <a:cs typeface="Courier New" pitchFamily="34" charset="-120"/>
               </a:rPr>
-              <a:t># remember this frame for the next one</a:t>
-            </a:r>
-            <a:endParaRPr lang="en-US" sz="1100" dirty="0"/>
+              <a:t># remember this frame for the next</a:t>
+            </a:r>
+            <a:endParaRPr lang="en-US" sz="1250" dirty="0"/>
           </a:p>
           <a:p>
             <a:pPr indent="0" marL="0">
               <a:buNone/>
             </a:pPr>
             <a:r>
-              <a:rPr lang="en-US" sz="1100" dirty="0">
+              <a:rPr lang="en-US" sz="1250" dirty="0">
                 <a:solidFill>
                   <a:srgbClr val="E6EDF2"/>
                 </a:solidFill>
@@ -8167,16 +8184,16 @@
                 <a:ea typeface="Courier New" pitchFamily="34" charset="-122"/>
                 <a:cs typeface="Courier New" pitchFamily="34" charset="-120"/>
               </a:rPr>
-              <a:t>    not  t1, t1</a:t>
-            </a:r>
-            <a:endParaRPr lang="en-US" sz="1100" dirty="0"/>
+              <a:t>        one</a:t>
+            </a:r>
+            <a:endParaRPr lang="en-US" sz="1250" dirty="0"/>
           </a:p>
           <a:p>
             <a:pPr indent="0" marL="0">
               <a:buNone/>
             </a:pPr>
             <a:r>
-              <a:rPr lang="en-US" sz="1100" dirty="0">
+              <a:rPr lang="en-US" sz="1250" dirty="0">
                 <a:solidFill>
                   <a:srgbClr val="E6EDF2"/>
                 </a:solidFill>
@@ -8184,47 +8201,47 @@
                 <a:ea typeface="Courier New" pitchFamily="34" charset="-122"/>
                 <a:cs typeface="Courier New" pitchFamily="34" charset="-120"/>
               </a:rPr>
-              <a:t>    and  t1, s0, t1            </a:t>
-            </a:r>
+              <a:t>    not  t1, t1</a:t>
+            </a:r>
+            <a:endParaRPr lang="en-US" sz="1250" dirty="0"/>
+          </a:p>
+          <a:p>
             <a:pPr indent="0" marL="0">
               <a:buNone/>
             </a:pPr>
             <a:r>
-              <a:rPr lang="en-US" sz="1100" dirty="0">
-                <a:solidFill>
-                  <a:srgbClr val="8FB3A0"/>
+              <a:rPr lang="en-US" sz="1250" dirty="0">
+                <a:solidFill>
+                  <a:srgbClr val="E6EDF2"/>
                 </a:solidFill>
                 <a:latin typeface="Courier New" pitchFamily="34" charset="0"/>
                 <a:ea typeface="Courier New" pitchFamily="34" charset="-122"/>
                 <a:cs typeface="Courier New" pitchFamily="34" charset="-120"/>
               </a:rPr>
-              <a:t># set now AND clear before = newly pressed</a:t>
-            </a:r>
-            <a:endParaRPr lang="en-US" sz="1100" dirty="0"/>
-          </a:p>
-          <a:p>
+              <a:t>    and  t1, s0, t1            </a:t>
+            </a:r>
             <a:pPr indent="0" marL="0">
               <a:buNone/>
             </a:pPr>
             <a:r>
-              <a:rPr lang="en-US" sz="1100" dirty="0">
-                <a:solidFill>
-                  <a:srgbClr val="E6EDF2"/>
+              <a:rPr lang="en-US" sz="1250" dirty="0">
+                <a:solidFill>
+                  <a:srgbClr val="8FB3A0"/>
                 </a:solidFill>
                 <a:latin typeface="Courier New" pitchFamily="34" charset="0"/>
                 <a:ea typeface="Courier New" pitchFamily="34" charset="-122"/>
                 <a:cs typeface="Courier New" pitchFamily="34" charset="-120"/>
               </a:rPr>
-              <a:t>    andi t1, t1, BTN_A</a:t>
-            </a:r>
-            <a:endParaRPr lang="en-US" sz="1100" dirty="0"/>
+              <a:t># set now AND clear before = newly</a:t>
+            </a:r>
+            <a:endParaRPr lang="en-US" sz="1250" dirty="0"/>
           </a:p>
           <a:p>
             <a:pPr indent="0" marL="0">
               <a:buNone/>
             </a:pPr>
             <a:r>
-              <a:rPr lang="en-US" sz="1100" dirty="0">
+              <a:rPr lang="en-US" sz="1250" dirty="0">
                 <a:solidFill>
                   <a:srgbClr val="E6EDF2"/>
                 </a:solidFill>
@@ -8232,16 +8249,16 @@
                 <a:ea typeface="Courier New" pitchFamily="34" charset="-122"/>
                 <a:cs typeface="Courier New" pitchFamily="34" charset="-120"/>
               </a:rPr>
-              <a:t>    beqz t1, 9f</a:t>
-            </a:r>
-            <a:endParaRPr lang="en-US" sz="1100" dirty="0"/>
+              <a:t>        pressed</a:t>
+            </a:r>
+            <a:endParaRPr lang="en-US" sz="1250" dirty="0"/>
           </a:p>
           <a:p>
             <a:pPr indent="0" marL="0">
               <a:buNone/>
             </a:pPr>
             <a:r>
-              <a:rPr lang="en-US" sz="1100" dirty="0">
+              <a:rPr lang="en-US" sz="1250" dirty="0">
                 <a:solidFill>
                   <a:srgbClr val="E6EDF2"/>
                 </a:solidFill>
@@ -8249,16 +8266,16 @@
                 <a:ea typeface="Courier New" pitchFamily="34" charset="-122"/>
                 <a:cs typeface="Courier New" pitchFamily="34" charset="-120"/>
               </a:rPr>
-              <a:t>    la   t0, paused</a:t>
-            </a:r>
-            <a:endParaRPr lang="en-US" sz="1100" dirty="0"/>
+              <a:t>    andi t1, t1, BTN_A</a:t>
+            </a:r>
+            <a:endParaRPr lang="en-US" sz="1250" dirty="0"/>
           </a:p>
           <a:p>
             <a:pPr indent="0" marL="0">
               <a:buNone/>
             </a:pPr>
             <a:r>
-              <a:rPr lang="en-US" sz="1100" dirty="0">
+              <a:rPr lang="en-US" sz="1250" dirty="0">
                 <a:solidFill>
                   <a:srgbClr val="E6EDF2"/>
                 </a:solidFill>
@@ -8266,16 +8283,16 @@
                 <a:ea typeface="Courier New" pitchFamily="34" charset="-122"/>
                 <a:cs typeface="Courier New" pitchFamily="34" charset="-120"/>
               </a:rPr>
-              <a:t>    lw   t2, 0(t0)</a:t>
-            </a:r>
-            <a:endParaRPr lang="en-US" sz="1100" dirty="0"/>
+              <a:t>    beqz t1, 9f</a:t>
+            </a:r>
+            <a:endParaRPr lang="en-US" sz="1250" dirty="0"/>
           </a:p>
           <a:p>
             <a:pPr indent="0" marL="0">
               <a:buNone/>
             </a:pPr>
             <a:r>
-              <a:rPr lang="en-US" sz="1100" dirty="0">
+              <a:rPr lang="en-US" sz="1250" dirty="0">
                 <a:solidFill>
                   <a:srgbClr val="E6EDF2"/>
                 </a:solidFill>
@@ -8283,30 +8300,33 @@
                 <a:ea typeface="Courier New" pitchFamily="34" charset="-122"/>
                 <a:cs typeface="Courier New" pitchFamily="34" charset="-120"/>
               </a:rPr>
-              <a:t>    xori t2, t2, 1             </a:t>
-            </a:r>
+              <a:t>    la   t0, paused</a:t>
+            </a:r>
+            <a:endParaRPr lang="en-US" sz="1250" dirty="0"/>
+          </a:p>
+          <a:p>
             <a:pPr indent="0" marL="0">
               <a:buNone/>
             </a:pPr>
             <a:r>
-              <a:rPr lang="en-US" sz="1100" dirty="0">
-                <a:solidFill>
-                  <a:srgbClr val="8FB3A0"/>
+              <a:rPr lang="en-US" sz="1250" dirty="0">
+                <a:solidFill>
+                  <a:srgbClr val="E6EDF2"/>
                 </a:solidFill>
                 <a:latin typeface="Courier New" pitchFamily="34" charset="0"/>
                 <a:ea typeface="Courier New" pitchFamily="34" charset="-122"/>
                 <a:cs typeface="Courier New" pitchFamily="34" charset="-120"/>
               </a:rPr>
-              <a:t># flip 0 &lt;-&gt; 1</a:t>
-            </a:r>
-            <a:endParaRPr lang="en-US" sz="1100" dirty="0"/>
+              <a:t>    lw   t2, 0(t0)</a:t>
+            </a:r>
+            <a:endParaRPr lang="en-US" sz="1250" dirty="0"/>
           </a:p>
           <a:p>
             <a:pPr indent="0" marL="0">
               <a:buNone/>
             </a:pPr>
             <a:r>
-              <a:rPr lang="en-US" sz="1100" dirty="0">
+              <a:rPr lang="en-US" sz="1250" dirty="0">
                 <a:solidFill>
                   <a:srgbClr val="E6EDF2"/>
                 </a:solidFill>
@@ -8314,33 +8334,30 @@
                 <a:ea typeface="Courier New" pitchFamily="34" charset="-122"/>
                 <a:cs typeface="Courier New" pitchFamily="34" charset="-120"/>
               </a:rPr>
-              <a:t>    sw   t2, 0(t0)</a:t>
-            </a:r>
-            <a:endParaRPr lang="en-US" sz="1100" dirty="0"/>
-          </a:p>
-          <a:p>
+              <a:t>    xori t2, t2, 1             </a:t>
+            </a:r>
             <a:pPr indent="0" marL="0">
               <a:buNone/>
             </a:pPr>
             <a:r>
-              <a:rPr lang="en-US" sz="1100" dirty="0">
-                <a:solidFill>
-                  <a:srgbClr val="E6EDF2"/>
+              <a:rPr lang="en-US" sz="1250" dirty="0">
+                <a:solidFill>
+                  <a:srgbClr val="8FB3A0"/>
                 </a:solidFill>
                 <a:latin typeface="Courier New" pitchFamily="34" charset="0"/>
                 <a:ea typeface="Courier New" pitchFamily="34" charset="-122"/>
                 <a:cs typeface="Courier New" pitchFamily="34" charset="-120"/>
               </a:rPr>
-              <a:t>9:  la   t0, paused</a:t>
-            </a:r>
-            <a:endParaRPr lang="en-US" sz="1100" dirty="0"/>
+              <a:t># flip 0 &lt;-&gt; 1</a:t>
+            </a:r>
+            <a:endParaRPr lang="en-US" sz="1250" dirty="0"/>
           </a:p>
           <a:p>
             <a:pPr indent="0" marL="0">
               <a:buNone/>
             </a:pPr>
             <a:r>
-              <a:rPr lang="en-US" sz="1100" dirty="0">
+              <a:rPr lang="en-US" sz="1250" dirty="0">
                 <a:solidFill>
                   <a:srgbClr val="E6EDF2"/>
                 </a:solidFill>
@@ -8348,16 +8365,16 @@
                 <a:ea typeface="Courier New" pitchFamily="34" charset="-122"/>
                 <a:cs typeface="Courier New" pitchFamily="34" charset="-120"/>
               </a:rPr>
-              <a:t>    lw   t2, 0(t0)</a:t>
-            </a:r>
-            <a:endParaRPr lang="en-US" sz="1100" dirty="0"/>
+              <a:t>    sw   t2, 0(t0)</a:t>
+            </a:r>
+            <a:endParaRPr lang="en-US" sz="1250" dirty="0"/>
           </a:p>
           <a:p>
             <a:pPr indent="0" marL="0">
               <a:buNone/>
             </a:pPr>
             <a:r>
-              <a:rPr lang="en-US" sz="1100" dirty="0">
+              <a:rPr lang="en-US" sz="1250" dirty="0">
                 <a:solidFill>
                   <a:srgbClr val="E6EDF2"/>
                 </a:solidFill>
@@ -8365,23 +8382,57 @@
                 <a:ea typeface="Courier New" pitchFamily="34" charset="-122"/>
                 <a:cs typeface="Courier New" pitchFamily="34" charset="-120"/>
               </a:rPr>
-              <a:t>    bnez t2, update_done       </a:t>
-            </a:r>
+              <a:t>9:  la   t0, paused</a:t>
+            </a:r>
+            <a:endParaRPr lang="en-US" sz="1250" dirty="0"/>
+          </a:p>
+          <a:p>
             <a:pPr indent="0" marL="0">
               <a:buNone/>
             </a:pPr>
             <a:r>
-              <a:rPr lang="en-US" sz="1100" dirty="0">
-                <a:solidFill>
-                  <a:srgbClr val="8FB3A0"/>
+              <a:rPr lang="en-US" sz="1250" dirty="0">
+                <a:solidFill>
+                  <a:srgbClr val="E6EDF2"/>
                 </a:solidFill>
                 <a:latin typeface="Courier New" pitchFamily="34" charset="0"/>
                 <a:ea typeface="Courier New" pitchFamily="34" charset="-122"/>
                 <a:cs typeface="Courier New" pitchFamily="34" charset="-120"/>
               </a:rPr>
+              <a:t>    lw   t2, 0(t0)</a:t>
+            </a:r>
+            <a:endParaRPr lang="en-US" sz="1250" dirty="0"/>
+          </a:p>
+          <a:p>
+            <a:pPr indent="0" marL="0">
+              <a:buNone/>
+            </a:pPr>
+            <a:r>
+              <a:rPr lang="en-US" sz="1250" dirty="0">
+                <a:solidFill>
+                  <a:srgbClr val="E6EDF2"/>
+                </a:solidFill>
+                <a:latin typeface="Courier New" pitchFamily="34" charset="0"/>
+                <a:ea typeface="Courier New" pitchFamily="34" charset="-122"/>
+                <a:cs typeface="Courier New" pitchFamily="34" charset="-120"/>
+              </a:rPr>
+              <a:t>    bnez t2, update_done       </a:t>
+            </a:r>
+            <a:pPr indent="0" marL="0">
+              <a:buNone/>
+            </a:pPr>
+            <a:r>
+              <a:rPr lang="en-US" sz="1250" dirty="0">
+                <a:solidFill>
+                  <a:srgbClr val="8FB3A0"/>
+                </a:solidFill>
+                <a:latin typeface="Courier New" pitchFamily="34" charset="0"/>
+                <a:ea typeface="Courier New" pitchFamily="34" charset="-122"/>
+                <a:cs typeface="Courier New" pitchFamily="34" charset="-120"/>
+              </a:rPr>
               <a:t># paused: skip the rest of update</a:t>
             </a:r>
-            <a:endParaRPr lang="en-US" sz="1100" dirty="0"/>
+            <a:endParaRPr lang="en-US" sz="1250" dirty="0"/>
           </a:p>
         </p:txBody>
       </p:sp>
@@ -16942,7 +16993,7 @@
               <a:buNone/>
             </a:pPr>
             <a:r>
-              <a:rPr lang="en-US" sz="1150" dirty="0">
+              <a:rPr lang="en-US" sz="1250" dirty="0">
                 <a:solidFill>
                   <a:srgbClr val="E6EDF2"/>
                 </a:solidFill>
@@ -16956,7 +17007,7 @@
               <a:buNone/>
             </a:pPr>
             <a:r>
-              <a:rPr lang="en-US" sz="1150" dirty="0">
+              <a:rPr lang="en-US" sz="1250" dirty="0">
                 <a:solidFill>
                   <a:srgbClr val="8FB3A0"/>
                 </a:solidFill>
@@ -16964,16 +17015,16 @@
                 <a:ea typeface="Courier New" pitchFamily="34" charset="-122"/>
                 <a:cs typeface="Courier New" pitchFamily="34" charset="-120"/>
               </a:rPr>
-              <a:t># guard: bounce only while moving down</a:t>
-            </a:r>
-            <a:endParaRPr lang="en-US" sz="1150" dirty="0"/>
+              <a:t># guard: bounce only while moving</a:t>
+            </a:r>
+            <a:endParaRPr lang="en-US" sz="1250" dirty="0"/>
           </a:p>
           <a:p>
             <a:pPr indent="0" marL="0">
               <a:buNone/>
             </a:pPr>
             <a:r>
-              <a:rPr lang="en-US" sz="1150" dirty="0">
+              <a:rPr lang="en-US" sz="1250" dirty="0">
                 <a:solidFill>
                   <a:srgbClr val="E6EDF2"/>
                 </a:solidFill>
@@ -16981,16 +17032,16 @@
                 <a:ea typeface="Courier New" pitchFamily="34" charset="-122"/>
                 <a:cs typeface="Courier New" pitchFamily="34" charset="-120"/>
               </a:rPr>
-              <a:t>    neg  t1, t1</a:t>
-            </a:r>
-            <a:endParaRPr lang="en-US" sz="1150" dirty="0"/>
+              <a:t>        down</a:t>
+            </a:r>
+            <a:endParaRPr lang="en-US" sz="1250" dirty="0"/>
           </a:p>
           <a:p>
             <a:pPr indent="0" marL="0">
               <a:buNone/>
             </a:pPr>
             <a:r>
-              <a:rPr lang="en-US" sz="1150" dirty="0">
+              <a:rPr lang="en-US" sz="1250" dirty="0">
                 <a:solidFill>
                   <a:srgbClr val="E6EDF2"/>
                 </a:solidFill>
@@ -16998,16 +17049,16 @@
                 <a:ea typeface="Courier New" pitchFamily="34" charset="-122"/>
                 <a:cs typeface="Courier New" pitchFamily="34" charset="-120"/>
               </a:rPr>
-              <a:t>    sw   t1, 0(t0)</a:t>
-            </a:r>
-            <a:endParaRPr lang="en-US" sz="1150" dirty="0"/>
+              <a:t>    neg  t1, t1</a:t>
+            </a:r>
+            <a:endParaRPr lang="en-US" sz="1250" dirty="0"/>
           </a:p>
           <a:p>
             <a:pPr indent="0" marL="0">
               <a:buNone/>
             </a:pPr>
             <a:r>
-              <a:rPr lang="en-US" sz="1150" dirty="0">
+              <a:rPr lang="en-US" sz="1250" dirty="0">
                 <a:solidFill>
                   <a:srgbClr val="E6EDF2"/>
                 </a:solidFill>
@@ -17015,16 +17066,16 @@
                 <a:ea typeface="Courier New" pitchFamily="34" charset="-122"/>
                 <a:cs typeface="Courier New" pitchFamily="34" charset="-120"/>
               </a:rPr>
-              <a:t>    la   t0, score</a:t>
-            </a:r>
-            <a:endParaRPr lang="en-US" sz="1150" dirty="0"/>
+              <a:t>    sw   t1, 0(t0)</a:t>
+            </a:r>
+            <a:endParaRPr lang="en-US" sz="1250" dirty="0"/>
           </a:p>
           <a:p>
             <a:pPr indent="0" marL="0">
               <a:buNone/>
             </a:pPr>
             <a:r>
-              <a:rPr lang="en-US" sz="1150" dirty="0">
+              <a:rPr lang="en-US" sz="1250" dirty="0">
                 <a:solidFill>
                   <a:srgbClr val="E6EDF2"/>
                 </a:solidFill>
@@ -17032,16 +17083,16 @@
                 <a:ea typeface="Courier New" pitchFamily="34" charset="-122"/>
                 <a:cs typeface="Courier New" pitchFamily="34" charset="-120"/>
               </a:rPr>
-              <a:t>    lw   t1, 0(t0)</a:t>
-            </a:r>
-            <a:endParaRPr lang="en-US" sz="1150" dirty="0"/>
+              <a:t>    la   t0, score</a:t>
+            </a:r>
+            <a:endParaRPr lang="en-US" sz="1250" dirty="0"/>
           </a:p>
           <a:p>
             <a:pPr indent="0" marL="0">
               <a:buNone/>
             </a:pPr>
             <a:r>
-              <a:rPr lang="en-US" sz="1150" dirty="0">
+              <a:rPr lang="en-US" sz="1250" dirty="0">
                 <a:solidFill>
                   <a:srgbClr val="E6EDF2"/>
                 </a:solidFill>
@@ -17049,40 +17100,74 @@
                 <a:ea typeface="Courier New" pitchFamily="34" charset="-122"/>
                 <a:cs typeface="Courier New" pitchFamily="34" charset="-120"/>
               </a:rPr>
-              <a:t>    addi t1, t1, 1             </a:t>
-            </a:r>
+              <a:t>    lw   t1, 0(t0)</a:t>
+            </a:r>
+            <a:endParaRPr lang="en-US" sz="1250" dirty="0"/>
+          </a:p>
+          <a:p>
             <a:pPr indent="0" marL="0">
               <a:buNone/>
             </a:pPr>
             <a:r>
-              <a:rPr lang="en-US" sz="1150" dirty="0">
-                <a:solidFill>
-                  <a:srgbClr val="8FB3A0"/>
+              <a:rPr lang="en-US" sz="1250" dirty="0">
+                <a:solidFill>
+                  <a:srgbClr val="E6EDF2"/>
                 </a:solidFill>
                 <a:latin typeface="Courier New" pitchFamily="34" charset="0"/>
                 <a:ea typeface="Courier New" pitchFamily="34" charset="-122"/>
                 <a:cs typeface="Courier New" pitchFamily="34" charset="-120"/>
               </a:rPr>
-              <a:t># inside the guard: one hit, one point</a:t>
-            </a:r>
-            <a:endParaRPr lang="en-US" sz="1150" dirty="0"/>
-          </a:p>
-          <a:p>
+              <a:t>    addi t1, t1, 1             </a:t>
+            </a:r>
             <a:pPr indent="0" marL="0">
               <a:buNone/>
             </a:pPr>
             <a:r>
-              <a:rPr lang="en-US" sz="1150" dirty="0">
-                <a:solidFill>
-                  <a:srgbClr val="E6EDF2"/>
+              <a:rPr lang="en-US" sz="1250" dirty="0">
+                <a:solidFill>
+                  <a:srgbClr val="8FB3A0"/>
                 </a:solidFill>
                 <a:latin typeface="Courier New" pitchFamily="34" charset="0"/>
                 <a:ea typeface="Courier New" pitchFamily="34" charset="-122"/>
                 <a:cs typeface="Courier New" pitchFamily="34" charset="-120"/>
               </a:rPr>
+              <a:t># inside the guard: one hit, one</a:t>
+            </a:r>
+            <a:endParaRPr lang="en-US" sz="1250" dirty="0"/>
+          </a:p>
+          <a:p>
+            <a:pPr indent="0" marL="0">
+              <a:buNone/>
+            </a:pPr>
+            <a:r>
+              <a:rPr lang="en-US" sz="1250" dirty="0">
+                <a:solidFill>
+                  <a:srgbClr val="E6EDF2"/>
+                </a:solidFill>
+                <a:latin typeface="Courier New" pitchFamily="34" charset="0"/>
+                <a:ea typeface="Courier New" pitchFamily="34" charset="-122"/>
+                <a:cs typeface="Courier New" pitchFamily="34" charset="-120"/>
+              </a:rPr>
+              <a:t>        point</a:t>
+            </a:r>
+            <a:endParaRPr lang="en-US" sz="1250" dirty="0"/>
+          </a:p>
+          <a:p>
+            <a:pPr indent="0" marL="0">
+              <a:buNone/>
+            </a:pPr>
+            <a:r>
+              <a:rPr lang="en-US" sz="1250" dirty="0">
+                <a:solidFill>
+                  <a:srgbClr val="E6EDF2"/>
+                </a:solidFill>
+                <a:latin typeface="Courier New" pitchFamily="34" charset="0"/>
+                <a:ea typeface="Courier New" pitchFamily="34" charset="-122"/>
+                <a:cs typeface="Courier New" pitchFamily="34" charset="-120"/>
+              </a:rPr>
               <a:t>    sw   t1, 0(t0)</a:t>
             </a:r>
-            <a:endParaRPr lang="en-US" sz="1150" dirty="0"/>
+            <a:endParaRPr lang="en-US" sz="1250" dirty="0"/>
           </a:p>
         </p:txBody>
       </p:sp>
